--- a/Projects/Module01-UnderstandingCodingAgents/Module01 - Understanding Coding Agents.pptx
+++ b/Projects/Module01-UnderstandingCodingAgents/Module01 - Understanding Coding Agents.pptx
@@ -4806,7 +4806,7 @@
       </p:sp>
       <p:pic>
         <p:nvPicPr>
-          <p:cNvPr id="8" name="Image 0" descr="/home/claude/deck/icons/brain.png">    </p:cNvPr>
+          <p:cNvPr id="8" name="Image 0" descr="/home/claude/deck/icons/brain_navy.png">    </p:cNvPr>
           <p:cNvPicPr>
             <a:picLocks noChangeAspect="1"/>
           </p:cNvPicPr>
